--- a/slides/project_presentation.pptx
+++ b/slides/project_presentation.pptx
@@ -813,17 +813,11 @@
           <a:p>
             <a:r>
               <a:rPr lang="en-US" dirty="0"/>
-              <a:t>#RQ6 Result: Airbnb guest ratings differ significantly across locations. The Kruskal Wallis test produced an H statistic of 74.73 with a p value below 0.001, indicating that the differences in ratings across countries are statistically significant.</a:t>
+              <a:t>#RQ6 Result: Airbnb guest ratings differ significantly across locations. The Kruskal Wallis test produced an H statistic of 65.785 with a p value below 0.001, indicating that the differences in ratings across countries are statistically significant.</a:t>
             </a:r>
           </a:p>
           <a:p>
             <a:endParaRPr lang="en-US" dirty="0"/>
-          </a:p>
-          <a:p>
-            <a:r>
-              <a:rPr lang="en-US" dirty="0"/>
-              <a:t>#Among the locations included in the analysis, North Carolina, US recorded the highest average rating at 4.963, followed by the UK at 4.927 and Germany at 4.925. At the lower end, Malaysia recorded 4.747, Vietnam 4.756, and Spain 4.762.</a:t>
-            </a:r>
           </a:p>
           <a:p>
             <a:endParaRPr lang="en-US" dirty="0"/>
@@ -921,7 +915,19 @@
           <a:p>
             <a:r>
               <a:rPr lang="en-US" dirty="0"/>
-              <a:t>#RQ7 Result: Airbnb prices differ significantly across locations. The Kruskal Wallis test produced an H statistic of 175.778 with p &lt; 0.001, confirming a statistically significant difference in listing prices across locations. California recorded the highest average price at $371.91, followed by Texas at $264.60 and North Carolina at $235.83. Malaysia had the lowest average price at $56.70, followed by Vietnam at $66.62 and Germany at $79.38.</a:t>
+              <a:t>#RQ7 Result: Airbnb prices differ significantly across locations. The Kruskal Wallis test produced an H statistic of 196.358 with p &lt; </a:t>
+            </a:r>
+            <a:r>
+              <a:rPr lang="en-PH" dirty="0">
+                <a:solidFill>
+                  <a:schemeClr val="bg1"/>
+                </a:solidFill>
+              </a:rPr>
+              <a:t>5.903294656518362e-31</a:t>
+            </a:r>
+            <a:r>
+              <a:rPr lang="en-US" dirty="0"/>
+              <a:t>, confirming a statistically significant difference in listing prices across locations. United States recorded the highest average price at $220. Malaysia had the lowest average price at $52, followed by Thailand at $65 and Philippines 69.</a:t>
             </a:r>
           </a:p>
           <a:p>
@@ -930,17 +936,14 @@
           <a:p>
             <a:r>
               <a:rPr lang="en-US" dirty="0"/>
-              <a:t>#Conclusion: Location is significantly associated with Airbnb listing prices. Properties in locations such as California, Texas, and North Carolina tend to command substantially higher prices, while listings in Malaysia and Vietnam are considerably less expensive. This suggests that geographic market conditions are an important factor in Airbnb pricing.</a:t>
+              <a:t>#Conclusion: Location is significantly associated with Airbnb listing prices. Properties in locations such as USA, Canada, and Indonesia tend to command substantially higher prices, while listings in Malaysia and Thailand are considerably less expensive. This suggests that geographic market conditions are an important factor in Airbnb pricing.</a:t>
             </a:r>
           </a:p>
           <a:p>
             <a:endParaRPr lang="en-US" dirty="0"/>
           </a:p>
           <a:p>
-            <a:r>
-              <a:rPr lang="en-US" dirty="0"/>
-              <a:t>#There is also a useful analytical observation in your results. Average and median prices sometimes differ considerably. For example, the Philippines has an average price of $124.21 but a median of only $65.50. This suggests that some relatively expensive listings are pulling the average upward. That is why using the median price in your RQ7 graph was a good choice.</a:t>
-            </a:r>
+            <a:endParaRPr lang="en-US" dirty="0"/>
           </a:p>
           <a:p>
             <a:endParaRPr lang="en-US" dirty="0"/>
@@ -3829,30 +3832,6 @@
           <a:chExt cx="0" cy="0"/>
         </a:xfrm>
       </p:grpSpPr>
-      <p:pic>
-        <p:nvPicPr>
-          <p:cNvPr id="2" name="Image 0" descr="preencoded.png"/>
-          <p:cNvPicPr>
-            <a:picLocks noChangeAspect="1"/>
-          </p:cNvPicPr>
-          <p:nvPr/>
-        </p:nvPicPr>
-        <p:blipFill>
-          <a:blip r:embed="rId3"/>
-          <a:stretch>
-            <a:fillRect/>
-          </a:stretch>
-        </p:blipFill>
-        <p:spPr>
-          <a:xfrm>
-            <a:off x="661475" y="540445"/>
-            <a:ext cx="7640248" cy="3768527"/>
-          </a:xfrm>
-          <a:prstGeom prst="rect">
-            <a:avLst/>
-          </a:prstGeom>
-        </p:spPr>
-      </p:pic>
       <p:sp>
         <p:nvSpPr>
           <p:cNvPr id="3" name="Shape 0"/>
@@ -4037,7 +4016,7 @@
                 <a:ea typeface="Inter Bold" pitchFamily="34" charset="-122"/>
                 <a:cs typeface="Inter Bold" pitchFamily="34" charset="-120"/>
               </a:rPr>
-              <a:t>(H = 74.73, p = 0.0)</a:t>
+              <a:t>(H = 65.785, p = 0.0)</a:t>
             </a:r>
             <a:r>
               <a:rPr lang="en-US" sz="1450" dirty="0">
@@ -4069,6 +4048,36 @@
           <p:nvPr/>
         </p:nvPicPr>
         <p:blipFill>
+          <a:blip r:embed="rId3"/>
+          <a:stretch>
+            <a:fillRect/>
+          </a:stretch>
+        </p:blipFill>
+        <p:spPr>
+          <a:xfrm>
+            <a:off x="8474855" y="716260"/>
+            <a:ext cx="3461954" cy="3462040"/>
+          </a:xfrm>
+          <a:prstGeom prst="rect">
+            <a:avLst/>
+          </a:prstGeom>
+        </p:spPr>
+      </p:pic>
+      <p:pic>
+        <p:nvPicPr>
+          <p:cNvPr id="8" name="Picture 7">
+            <a:extLst>
+              <a:ext uri="{FF2B5EF4-FFF2-40B4-BE49-F238E27FC236}">
+                <a16:creationId xmlns:a16="http://schemas.microsoft.com/office/drawing/2014/main" id="{57B74C9C-4DC1-7EAB-5A33-E8CBCB60DE52}"/>
+              </a:ext>
+            </a:extLst>
+          </p:cNvPr>
+          <p:cNvPicPr>
+            <a:picLocks noChangeAspect="1"/>
+          </p:cNvPicPr>
+          <p:nvPr/>
+        </p:nvPicPr>
+        <p:blipFill>
           <a:blip r:embed="rId4"/>
           <a:stretch>
             <a:fillRect/>
@@ -4076,8 +4085,8 @@
         </p:blipFill>
         <p:spPr>
           <a:xfrm>
-            <a:off x="8474855" y="716260"/>
-            <a:ext cx="3461954" cy="3462040"/>
+            <a:off x="685800" y="762000"/>
+            <a:ext cx="7645400" cy="3636776"/>
           </a:xfrm>
           <a:prstGeom prst="rect">
             <a:avLst/>
@@ -4222,9 +4231,207 @@
           </a:p>
         </p:txBody>
       </p:sp>
+      <p:sp>
+        <p:nvSpPr>
+          <p:cNvPr id="6" name="Text 3"/>
+          <p:cNvSpPr/>
+          <p:nvPr/>
+        </p:nvSpPr>
+        <p:spPr>
+          <a:xfrm>
+            <a:off x="8032251" y="2586236"/>
+            <a:ext cx="3504219" cy="295275"/>
+          </a:xfrm>
+          <a:prstGeom prst="rect">
+            <a:avLst/>
+          </a:prstGeom>
+          <a:noFill/>
+          <a:ln/>
+        </p:spPr>
+        <p:txBody>
+          <a:bodyPr wrap="none" lIns="0" tIns="0" rIns="0" bIns="0" rtlCol="0" anchor="t"/>
+          <a:lstStyle/>
+          <a:p>
+            <a:pPr marL="0" indent="0" algn="l">
+              <a:lnSpc>
+                <a:spcPct val="104000"/>
+              </a:lnSpc>
+              <a:buNone/>
+            </a:pPr>
+            <a:r>
+              <a:rPr lang="en-US" sz="1850" b="1" dirty="0">
+                <a:solidFill>
+                  <a:srgbClr val="FFFFFF"/>
+                </a:solidFill>
+                <a:latin typeface="Inter Bold" pitchFamily="34" charset="0"/>
+                <a:ea typeface="Inter Bold" pitchFamily="34" charset="-122"/>
+                <a:cs typeface="Inter Bold" pitchFamily="34" charset="-120"/>
+              </a:rPr>
+              <a:t>Statistical Evidence</a:t>
+            </a:r>
+            <a:endParaRPr lang="en-US" sz="1850" dirty="0"/>
+          </a:p>
+        </p:txBody>
+      </p:sp>
+      <p:sp>
+        <p:nvSpPr>
+          <p:cNvPr id="7" name="Text 4"/>
+          <p:cNvSpPr/>
+          <p:nvPr/>
+        </p:nvSpPr>
+        <p:spPr>
+          <a:xfrm>
+            <a:off x="8032251" y="3070523"/>
+            <a:ext cx="3504219" cy="2457053"/>
+          </a:xfrm>
+          <a:prstGeom prst="rect">
+            <a:avLst/>
+          </a:prstGeom>
+          <a:noFill/>
+          <a:ln/>
+        </p:spPr>
+        <p:txBody>
+          <a:bodyPr wrap="square" lIns="0" tIns="0" rIns="0" bIns="0" rtlCol="0" anchor="t"/>
+          <a:lstStyle/>
+          <a:p>
+            <a:pPr marL="0" indent="0" algn="l">
+              <a:lnSpc>
+                <a:spcPct val="133000"/>
+              </a:lnSpc>
+              <a:spcAft>
+                <a:spcPts val="1300"/>
+              </a:spcAft>
+              <a:buNone/>
+            </a:pPr>
+            <a:r>
+              <a:rPr lang="en-US" sz="1450" b="1" dirty="0">
+                <a:solidFill>
+                  <a:srgbClr val="FFFFFF"/>
+                </a:solidFill>
+                <a:latin typeface="Inter Bold" pitchFamily="34" charset="0"/>
+                <a:ea typeface="Inter Bold" pitchFamily="34" charset="-122"/>
+                <a:cs typeface="Inter Bold" pitchFamily="34" charset="-120"/>
+              </a:rPr>
+              <a:t>Kruskal-Wallis H:</a:t>
+            </a:r>
+            <a:r>
+              <a:rPr lang="en-US" sz="1450" dirty="0">
+                <a:solidFill>
+                  <a:srgbClr val="FFFFFF"/>
+                </a:solidFill>
+                <a:latin typeface="Inter" pitchFamily="34" charset="0"/>
+                <a:ea typeface="Inter" pitchFamily="34" charset="-122"/>
+                <a:cs typeface="Inter" pitchFamily="34" charset="-120"/>
+              </a:rPr>
+              <a:t> 196.358</a:t>
+            </a:r>
+            <a:endParaRPr lang="en-US" sz="1450" dirty="0"/>
+          </a:p>
+          <a:p>
+            <a:pPr>
+              <a:lnSpc>
+                <a:spcPct val="133000"/>
+              </a:lnSpc>
+              <a:spcAft>
+                <a:spcPts val="1300"/>
+              </a:spcAft>
+            </a:pPr>
+            <a:r>
+              <a:rPr lang="en-US" sz="1450" b="1" dirty="0">
+                <a:solidFill>
+                  <a:srgbClr val="FFFFFF"/>
+                </a:solidFill>
+                <a:latin typeface="Inter Bold" pitchFamily="34" charset="0"/>
+                <a:ea typeface="Inter Bold" pitchFamily="34" charset="-122"/>
+                <a:cs typeface="Inter Bold" pitchFamily="34" charset="-120"/>
+              </a:rPr>
+              <a:t>P-Value:</a:t>
+            </a:r>
+            <a:r>
+              <a:rPr lang="en-US" sz="1450" dirty="0">
+                <a:solidFill>
+                  <a:srgbClr val="FFFFFF"/>
+                </a:solidFill>
+                <a:latin typeface="Inter" pitchFamily="34" charset="0"/>
+                <a:ea typeface="Inter" pitchFamily="34" charset="-122"/>
+                <a:cs typeface="Inter" pitchFamily="34" charset="-120"/>
+              </a:rPr>
+              <a:t> </a:t>
+            </a:r>
+            <a:r>
+              <a:rPr lang="en-PH" dirty="0">
+                <a:solidFill>
+                  <a:schemeClr val="bg1"/>
+                </a:solidFill>
+              </a:rPr>
+              <a:t>5.903294656518362e-31</a:t>
+            </a:r>
+          </a:p>
+          <a:p>
+            <a:pPr marL="0" indent="0" algn="l">
+              <a:lnSpc>
+                <a:spcPct val="133000"/>
+              </a:lnSpc>
+              <a:spcAft>
+                <a:spcPts val="1300"/>
+              </a:spcAft>
+              <a:buNone/>
+            </a:pPr>
+            <a:endParaRPr lang="en-US" sz="1450" dirty="0"/>
+          </a:p>
+          <a:p>
+            <a:pPr marL="0" indent="0" algn="l">
+              <a:lnSpc>
+                <a:spcPct val="133000"/>
+              </a:lnSpc>
+              <a:buNone/>
+            </a:pPr>
+            <a:r>
+              <a:rPr lang="en-US" sz="1450" dirty="0">
+                <a:solidFill>
+                  <a:srgbClr val="FFFFFF"/>
+                </a:solidFill>
+                <a:latin typeface="Inter" pitchFamily="34" charset="0"/>
+                <a:ea typeface="Inter" pitchFamily="34" charset="-122"/>
+                <a:cs typeface="Inter" pitchFamily="34" charset="-120"/>
+              </a:rPr>
+              <a:t>The extremely low p-value confirms that Airbnb prices differ </a:t>
+            </a:r>
+            <a:r>
+              <a:rPr lang="en-US" sz="1450" b="1" dirty="0">
+                <a:solidFill>
+                  <a:srgbClr val="FFFFFF"/>
+                </a:solidFill>
+                <a:latin typeface="Inter Bold" pitchFamily="34" charset="0"/>
+                <a:ea typeface="Inter Bold" pitchFamily="34" charset="-122"/>
+                <a:cs typeface="Inter Bold" pitchFamily="34" charset="-120"/>
+              </a:rPr>
+              <a:t>significantly</a:t>
+            </a:r>
+            <a:r>
+              <a:rPr lang="en-US" sz="1450" dirty="0">
+                <a:solidFill>
+                  <a:srgbClr val="FFFFFF"/>
+                </a:solidFill>
+                <a:latin typeface="Inter" pitchFamily="34" charset="0"/>
+                <a:ea typeface="Inter" pitchFamily="34" charset="-122"/>
+                <a:cs typeface="Inter" pitchFamily="34" charset="-120"/>
+              </a:rPr>
+              <a:t> across locations. Geography is one of the strongest determinants of listing price in this dataset.</a:t>
+            </a:r>
+            <a:endParaRPr lang="en-US" sz="1450" dirty="0"/>
+          </a:p>
+        </p:txBody>
+      </p:sp>
       <p:pic>
         <p:nvPicPr>
-          <p:cNvPr id="5" name="Image 0" descr="preencoded.png"/>
+          <p:cNvPr id="8" name="Picture 7">
+            <a:extLst>
+              <a:ext uri="{FF2B5EF4-FFF2-40B4-BE49-F238E27FC236}">
+                <a16:creationId xmlns:a16="http://schemas.microsoft.com/office/drawing/2014/main" id="{62464731-F749-2F9E-587D-9EA473D89030}"/>
+              </a:ext>
+            </a:extLst>
+          </p:cNvPr>
           <p:cNvPicPr>
             <a:picLocks noChangeAspect="1"/>
           </p:cNvPicPr>
@@ -4238,188 +4445,14 @@
         </p:blipFill>
         <p:spPr>
           <a:xfrm>
-            <a:off x="661475" y="1992610"/>
-            <a:ext cx="6903269" cy="4109641"/>
+            <a:off x="641850" y="1628775"/>
+            <a:ext cx="7035800" cy="4185603"/>
           </a:xfrm>
           <a:prstGeom prst="rect">
             <a:avLst/>
           </a:prstGeom>
         </p:spPr>
       </p:pic>
-      <p:sp>
-        <p:nvSpPr>
-          <p:cNvPr id="6" name="Text 3"/>
-          <p:cNvSpPr/>
-          <p:nvPr/>
-        </p:nvSpPr>
-        <p:spPr>
-          <a:xfrm>
-            <a:off x="8032251" y="2586236"/>
-            <a:ext cx="3504219" cy="295275"/>
-          </a:xfrm>
-          <a:prstGeom prst="rect">
-            <a:avLst/>
-          </a:prstGeom>
-          <a:noFill/>
-          <a:ln/>
-        </p:spPr>
-        <p:txBody>
-          <a:bodyPr wrap="none" lIns="0" tIns="0" rIns="0" bIns="0" rtlCol="0" anchor="t"/>
-          <a:lstStyle/>
-          <a:p>
-            <a:pPr marL="0" indent="0" algn="l">
-              <a:lnSpc>
-                <a:spcPct val="104000"/>
-              </a:lnSpc>
-              <a:buNone/>
-            </a:pPr>
-            <a:r>
-              <a:rPr lang="en-US" sz="1850" b="1" dirty="0">
-                <a:solidFill>
-                  <a:srgbClr val="FFFFFF"/>
-                </a:solidFill>
-                <a:latin typeface="Inter Bold" pitchFamily="34" charset="0"/>
-                <a:ea typeface="Inter Bold" pitchFamily="34" charset="-122"/>
-                <a:cs typeface="Inter Bold" pitchFamily="34" charset="-120"/>
-              </a:rPr>
-              <a:t>Statistical Evidence</a:t>
-            </a:r>
-            <a:endParaRPr lang="en-US" sz="1850" dirty="0"/>
-          </a:p>
-        </p:txBody>
-      </p:sp>
-      <p:sp>
-        <p:nvSpPr>
-          <p:cNvPr id="7" name="Text 4"/>
-          <p:cNvSpPr/>
-          <p:nvPr/>
-        </p:nvSpPr>
-        <p:spPr>
-          <a:xfrm>
-            <a:off x="8032251" y="3070523"/>
-            <a:ext cx="3504219" cy="2457053"/>
-          </a:xfrm>
-          <a:prstGeom prst="rect">
-            <a:avLst/>
-          </a:prstGeom>
-          <a:noFill/>
-          <a:ln/>
-        </p:spPr>
-        <p:txBody>
-          <a:bodyPr wrap="square" lIns="0" tIns="0" rIns="0" bIns="0" rtlCol="0" anchor="t"/>
-          <a:lstStyle/>
-          <a:p>
-            <a:pPr marL="0" indent="0" algn="l">
-              <a:lnSpc>
-                <a:spcPct val="133000"/>
-              </a:lnSpc>
-              <a:spcAft>
-                <a:spcPts val="1300"/>
-              </a:spcAft>
-              <a:buNone/>
-            </a:pPr>
-            <a:r>
-              <a:rPr lang="en-US" sz="1450" b="1" dirty="0">
-                <a:solidFill>
-                  <a:srgbClr val="FFFFFF"/>
-                </a:solidFill>
-                <a:latin typeface="Inter Bold" pitchFamily="34" charset="0"/>
-                <a:ea typeface="Inter Bold" pitchFamily="34" charset="-122"/>
-                <a:cs typeface="Inter Bold" pitchFamily="34" charset="-120"/>
-              </a:rPr>
-              <a:t>Kruskal-Wallis H:</a:t>
-            </a:r>
-            <a:r>
-              <a:rPr lang="en-US" sz="1450" dirty="0">
-                <a:solidFill>
-                  <a:srgbClr val="FFFFFF"/>
-                </a:solidFill>
-                <a:latin typeface="Inter" pitchFamily="34" charset="0"/>
-                <a:ea typeface="Inter" pitchFamily="34" charset="-122"/>
-                <a:cs typeface="Inter" pitchFamily="34" charset="-120"/>
-              </a:rPr>
-              <a:t> 175.778</a:t>
-            </a:r>
-            <a:endParaRPr lang="en-US" sz="1450" dirty="0"/>
-          </a:p>
-          <a:p>
-            <a:pPr marL="0" indent="0" algn="l">
-              <a:lnSpc>
-                <a:spcPct val="133000"/>
-              </a:lnSpc>
-              <a:spcAft>
-                <a:spcPts val="1300"/>
-              </a:spcAft>
-              <a:buNone/>
-            </a:pPr>
-            <a:r>
-              <a:rPr lang="en-US" sz="1450" b="1" dirty="0">
-                <a:solidFill>
-                  <a:srgbClr val="FFFFFF"/>
-                </a:solidFill>
-                <a:latin typeface="Inter Bold" pitchFamily="34" charset="0"/>
-                <a:ea typeface="Inter Bold" pitchFamily="34" charset="-122"/>
-                <a:cs typeface="Inter Bold" pitchFamily="34" charset="-120"/>
-              </a:rPr>
-              <a:t>P-Value:</a:t>
-            </a:r>
-            <a:r>
-              <a:rPr lang="en-US" sz="1450" dirty="0">
-                <a:solidFill>
-                  <a:srgbClr val="FFFFFF"/>
-                </a:solidFill>
-                <a:latin typeface="Inter" pitchFamily="34" charset="0"/>
-                <a:ea typeface="Inter" pitchFamily="34" charset="-122"/>
-                <a:cs typeface="Inter" pitchFamily="34" charset="-120"/>
-              </a:rPr>
-              <a:t> 4.68 × 10⁻²⁵</a:t>
-            </a:r>
-            <a:endParaRPr lang="en-US" sz="1450" dirty="0"/>
-          </a:p>
-          <a:p>
-            <a:pPr marL="0" indent="0" algn="l">
-              <a:lnSpc>
-                <a:spcPct val="133000"/>
-              </a:lnSpc>
-              <a:buNone/>
-            </a:pPr>
-            <a:r>
-              <a:rPr lang="en-US" sz="1450" dirty="0">
-                <a:solidFill>
-                  <a:srgbClr val="FFFFFF"/>
-                </a:solidFill>
-                <a:latin typeface="Inter" pitchFamily="34" charset="0"/>
-                <a:ea typeface="Inter" pitchFamily="34" charset="-122"/>
-                <a:cs typeface="Inter" pitchFamily="34" charset="-120"/>
-              </a:rPr>
-              <a:t>The extremely low p-value confirms that Airbnb prices differ </a:t>
-            </a:r>
-            <a:r>
-              <a:rPr lang="en-US" sz="1450" b="1" dirty="0">
-                <a:solidFill>
-                  <a:srgbClr val="FFFFFF"/>
-                </a:solidFill>
-                <a:latin typeface="Inter Bold" pitchFamily="34" charset="0"/>
-                <a:ea typeface="Inter Bold" pitchFamily="34" charset="-122"/>
-                <a:cs typeface="Inter Bold" pitchFamily="34" charset="-120"/>
-              </a:rPr>
-              <a:t>significantly</a:t>
-            </a:r>
-            <a:r>
-              <a:rPr lang="en-US" sz="1450" dirty="0">
-                <a:solidFill>
-                  <a:srgbClr val="FFFFFF"/>
-                </a:solidFill>
-                <a:latin typeface="Inter" pitchFamily="34" charset="0"/>
-                <a:ea typeface="Inter" pitchFamily="34" charset="-122"/>
-                <a:cs typeface="Inter" pitchFamily="34" charset="-120"/>
-              </a:rPr>
-              <a:t> across locations. Geography is one of the strongest determinants of listing price in this dataset.</a:t>
-            </a:r>
-            <a:endParaRPr lang="en-US" sz="1450" dirty="0"/>
-          </a:p>
-        </p:txBody>
-      </p:sp>
     </p:spTree>
   </p:cSld>
   <p:clrMapOvr>

--- a/slides/project_presentation.pptx
+++ b/slides/project_presentation.pptx
@@ -5,7 +5,7 @@
     <p:sldMasterId id="2147483648" r:id="rId1"/>
   </p:sldMasterIdLst>
   <p:notesMasterIdLst>
-    <p:notesMasterId r:id="rId21"/>
+    <p:notesMasterId r:id="rId22"/>
   </p:notesMasterIdLst>
   <p:sldIdLst>
     <p:sldId id="256" r:id="rId2"/>
@@ -27,18 +27,19 @@
     <p:sldId id="273" r:id="rId18"/>
     <p:sldId id="274" r:id="rId19"/>
     <p:sldId id="275" r:id="rId20"/>
+    <p:sldId id="277" r:id="rId21"/>
   </p:sldIdLst>
   <p:sldSz cx="12192000" cy="6858000"/>
   <p:notesSz cx="6858000" cy="12192000"/>
   <p:embeddedFontLst>
     <p:embeddedFont>
       <p:font typeface="Inter" panose="02000503000000020004" pitchFamily="2" charset="0"/>
-      <p:regular r:id="rId22"/>
+      <p:regular r:id="rId23"/>
     </p:embeddedFont>
     <p:embeddedFont>
       <p:font typeface="Inter Bold" panose="02000503000000020004" pitchFamily="2" charset="0"/>
-      <p:regular r:id="rId23"/>
-      <p:bold r:id="rId24"/>
+      <p:regular r:id="rId24"/>
+      <p:bold r:id="rId25"/>
     </p:embeddedFont>
   </p:embeddedFontLst>
   <p:defaultTextStyle>
@@ -2721,8 +2722,8 @@
         </p:nvSpPr>
         <p:spPr>
           <a:xfrm>
-            <a:off x="661475" y="2136676"/>
-            <a:ext cx="6296860" cy="1181298"/>
+            <a:off x="661475" y="1018309"/>
+            <a:ext cx="6296860" cy="2299665"/>
           </a:xfrm>
           <a:prstGeom prst="rect">
             <a:avLst/>
@@ -2732,7 +2733,7 @@
         </p:spPr>
         <p:txBody>
           <a:bodyPr wrap="square" lIns="0" tIns="0" rIns="0" bIns="0" rtlCol="0" anchor="t">
-            <a:normAutofit/>
+            <a:normAutofit fontScale="92500" lnSpcReduction="10000"/>
           </a:bodyPr>
           <a:lstStyle/>
           <a:p>
@@ -2743,7 +2744,7 @@
               <a:buNone/>
             </a:pPr>
             <a:r>
-              <a:rPr lang="en-US" sz="3700" b="1" dirty="0">
+              <a:rPr lang="en-US" sz="5400" b="1" dirty="0">
                 <a:solidFill>
                   <a:srgbClr val="FFFFFF"/>
                 </a:solidFill>
@@ -2753,7 +2754,7 @@
               </a:rPr>
               <a:t>From Poor Ratings to Exceptional Stays</a:t>
             </a:r>
-            <a:endParaRPr lang="en-US" sz="3700" dirty="0"/>
+            <a:endParaRPr lang="en-US" sz="5400" dirty="0"/>
           </a:p>
         </p:txBody>
       </p:sp>
@@ -2765,8 +2766,8 @@
         </p:nvSpPr>
         <p:spPr>
           <a:xfrm>
-            <a:off x="661475" y="3601442"/>
-            <a:ext cx="6296860" cy="1119882"/>
+            <a:off x="661475" y="3601441"/>
+            <a:ext cx="6296860" cy="1822613"/>
           </a:xfrm>
           <a:prstGeom prst="rect">
             <a:avLst/>
@@ -2776,7 +2777,7 @@
         </p:spPr>
         <p:txBody>
           <a:bodyPr wrap="square" lIns="0" tIns="0" rIns="0" bIns="0" rtlCol="0" anchor="t">
-            <a:normAutofit/>
+            <a:normAutofit lnSpcReduction="10000"/>
           </a:bodyPr>
           <a:lstStyle/>
           <a:p>
@@ -2790,7 +2791,7 @@
               <a:buNone/>
             </a:pPr>
             <a:r>
-              <a:rPr lang="en-US" sz="1450" dirty="0">
+              <a:rPr lang="en-US" sz="2400" dirty="0">
                 <a:solidFill>
                   <a:srgbClr val="FFFFFF"/>
                 </a:solidFill>
@@ -2800,7 +2801,7 @@
               </a:rPr>
               <a:t>A Data-Driven Analysis of Factors Influencing Airbnb Guest Satisfaction</a:t>
             </a:r>
-            <a:endParaRPr lang="en-US" sz="1450" dirty="0"/>
+            <a:endParaRPr lang="en-US" sz="2400" dirty="0"/>
           </a:p>
           <a:p>
             <a:pPr marL="0" indent="0" algn="l">
@@ -2810,7 +2811,7 @@
               <a:buNone/>
             </a:pPr>
             <a:r>
-              <a:rPr lang="en-US" sz="1450" i="1" dirty="0">
+              <a:rPr lang="en-US" i="1" dirty="0">
                 <a:solidFill>
                   <a:srgbClr val="FFFFFF"/>
                 </a:solidFill>
@@ -2818,9 +2819,50 @@
                 <a:ea typeface="Inter" pitchFamily="34" charset="-122"/>
                 <a:cs typeface="Inter" pitchFamily="34" charset="-120"/>
               </a:rPr>
-              <a:t>By Jan Noel Vero &amp; Nadiya Al-Shahaibi — Business Analysts</a:t>
-            </a:r>
-            <a:endParaRPr lang="en-US" sz="1450" dirty="0"/>
+              <a:t>By Jan Noel Vero &amp; Nadiya Al-</a:t>
+            </a:r>
+            <a:r>
+              <a:rPr lang="en-US" i="1" dirty="0" err="1">
+                <a:solidFill>
+                  <a:srgbClr val="FFFFFF"/>
+                </a:solidFill>
+                <a:latin typeface="Inter" pitchFamily="34" charset="0"/>
+                <a:ea typeface="Inter" pitchFamily="34" charset="-122"/>
+                <a:cs typeface="Inter" pitchFamily="34" charset="-120"/>
+              </a:rPr>
+              <a:t>Shahaibi</a:t>
+            </a:r>
+            <a:r>
+              <a:rPr lang="en-US" i="1" dirty="0">
+                <a:solidFill>
+                  <a:srgbClr val="FFFFFF"/>
+                </a:solidFill>
+                <a:latin typeface="Inter" pitchFamily="34" charset="0"/>
+                <a:ea typeface="Inter" pitchFamily="34" charset="-122"/>
+                <a:cs typeface="Inter" pitchFamily="34" charset="-120"/>
+              </a:rPr>
+              <a:t> </a:t>
+            </a:r>
+          </a:p>
+          <a:p>
+            <a:pPr marL="0" indent="0" algn="l">
+              <a:lnSpc>
+                <a:spcPct val="133000"/>
+              </a:lnSpc>
+              <a:buNone/>
+            </a:pPr>
+            <a:r>
+              <a:rPr lang="en-US" i="1" dirty="0">
+                <a:solidFill>
+                  <a:srgbClr val="FFFFFF"/>
+                </a:solidFill>
+                <a:latin typeface="Inter" pitchFamily="34" charset="0"/>
+                <a:ea typeface="Inter" pitchFamily="34" charset="-122"/>
+                <a:cs typeface="Inter" pitchFamily="34" charset="-120"/>
+              </a:rPr>
+              <a:t>Business Analysts</a:t>
+            </a:r>
+            <a:endParaRPr lang="en-US" dirty="0"/>
           </a:p>
         </p:txBody>
       </p:sp>
@@ -3296,7 +3338,7 @@
         </p:nvSpPr>
         <p:spPr>
           <a:xfrm>
-            <a:off x="8008340" y="2412504"/>
+            <a:off x="8008340" y="1642566"/>
             <a:ext cx="3528130" cy="271859"/>
           </a:xfrm>
           <a:prstGeom prst="rect">
@@ -3338,8 +3380,8 @@
         </p:nvSpPr>
         <p:spPr>
           <a:xfrm>
-            <a:off x="8008340" y="2844403"/>
-            <a:ext cx="3528130" cy="1335980"/>
+            <a:off x="8008340" y="1914425"/>
+            <a:ext cx="3528130" cy="2265958"/>
           </a:xfrm>
           <a:prstGeom prst="rect">
             <a:avLst/>
@@ -3349,7 +3391,7 @@
         </p:spPr>
         <p:txBody>
           <a:bodyPr wrap="square" lIns="0" tIns="0" rIns="0" bIns="0" rtlCol="0" anchor="t">
-            <a:normAutofit/>
+            <a:normAutofit fontScale="92500" lnSpcReduction="10000"/>
           </a:bodyPr>
           <a:lstStyle/>
           <a:p>
@@ -3360,7 +3402,7 @@
               <a:buNone/>
             </a:pPr>
             <a:r>
-              <a:rPr lang="en-US" sz="1350" dirty="0">
+              <a:rPr lang="en-US" dirty="0">
                 <a:solidFill>
                   <a:srgbClr val="FFFFFF"/>
                 </a:solidFill>
@@ -3370,7 +3412,7 @@
               </a:rPr>
               <a:t>Listings mentioning more amenities tend to have higher prices, and this relationship is statistically significant. However, the correlation is weak — amenities alone do not strongly determine Airbnb prices.</a:t>
             </a:r>
-            <a:endParaRPr lang="en-US" sz="1350" dirty="0"/>
+            <a:endParaRPr lang="en-US" dirty="0"/>
           </a:p>
         </p:txBody>
       </p:sp>
@@ -3617,7 +3659,7 @@
         </p:nvSpPr>
         <p:spPr>
           <a:xfrm>
-            <a:off x="661475" y="2564011"/>
+            <a:off x="661475" y="1923305"/>
             <a:ext cx="3528130" cy="271859"/>
           </a:xfrm>
           <a:prstGeom prst="rect">
@@ -3659,8 +3701,8 @@
         </p:nvSpPr>
         <p:spPr>
           <a:xfrm>
-            <a:off x="661475" y="2995910"/>
-            <a:ext cx="3528130" cy="2425700"/>
+            <a:off x="661475" y="2414018"/>
+            <a:ext cx="3528130" cy="3467235"/>
           </a:xfrm>
           <a:prstGeom prst="rect">
             <a:avLst/>
@@ -3682,7 +3724,7 @@
               <a:buNone/>
             </a:pPr>
             <a:r>
-              <a:rPr lang="en-US" sz="1350" b="1" dirty="0">
+              <a:rPr lang="en-US" b="1" dirty="0">
                 <a:solidFill>
                   <a:srgbClr val="FFFFFF"/>
                 </a:solidFill>
@@ -3693,7 +3735,7 @@
               <a:t>Spearman Correlation:</a:t>
             </a:r>
             <a:r>
-              <a:rPr lang="en-US" sz="1350" dirty="0">
+              <a:rPr lang="en-US" dirty="0">
                 <a:solidFill>
                   <a:srgbClr val="FFFFFF"/>
                 </a:solidFill>
@@ -3703,7 +3745,7 @@
               </a:rPr>
               <a:t> −0.115</a:t>
             </a:r>
-            <a:endParaRPr lang="en-US" sz="1350" dirty="0"/>
+            <a:endParaRPr lang="en-US" dirty="0"/>
           </a:p>
           <a:p>
             <a:pPr marL="0" indent="0" algn="l">
@@ -3716,7 +3758,7 @@
               <a:buNone/>
             </a:pPr>
             <a:r>
-              <a:rPr lang="en-US" sz="1350" b="1" dirty="0">
+              <a:rPr lang="en-US" b="1" dirty="0">
                 <a:solidFill>
                   <a:srgbClr val="FFFFFF"/>
                 </a:solidFill>
@@ -3727,7 +3769,7 @@
               <a:t>P-Value:</a:t>
             </a:r>
             <a:r>
-              <a:rPr lang="en-US" sz="1350" dirty="0">
+              <a:rPr lang="en-US" dirty="0">
                 <a:solidFill>
                   <a:srgbClr val="FFFFFF"/>
                 </a:solidFill>
@@ -3737,7 +3779,7 @@
               </a:rPr>
               <a:t> 0.0045</a:t>
             </a:r>
-            <a:endParaRPr lang="en-US" sz="1350" dirty="0"/>
+            <a:endParaRPr lang="en-US" dirty="0"/>
           </a:p>
           <a:p>
             <a:pPr marL="0" indent="0" algn="l">
@@ -3747,7 +3789,7 @@
               <a:buNone/>
             </a:pPr>
             <a:r>
-              <a:rPr lang="en-US" sz="1350" dirty="0">
+              <a:rPr lang="en-US" dirty="0">
                 <a:solidFill>
                   <a:srgbClr val="FFFFFF"/>
                 </a:solidFill>
@@ -3758,7 +3800,7 @@
               <a:t>There is a </a:t>
             </a:r>
             <a:r>
-              <a:rPr lang="en-US" sz="1350" b="1" dirty="0">
+              <a:rPr lang="en-US" b="1" dirty="0">
                 <a:solidFill>
                   <a:srgbClr val="FFFFFF"/>
                 </a:solidFill>
@@ -3769,7 +3811,7 @@
               <a:t>statistically significant</a:t>
             </a:r>
             <a:r>
-              <a:rPr lang="en-US" sz="1350" dirty="0">
+              <a:rPr lang="en-US" dirty="0">
                 <a:solidFill>
                   <a:srgbClr val="FFFFFF"/>
                 </a:solidFill>
@@ -3779,7 +3821,7 @@
               </a:rPr>
               <a:t> relationship between the number of amenities mentioned and Airbnb ratings — but it is negative and weak. More amenities listed does not translate to better guest satisfaction.</a:t>
             </a:r>
-            <a:endParaRPr lang="en-US" sz="1350" dirty="0"/>
+            <a:endParaRPr lang="en-US" dirty="0"/>
           </a:p>
         </p:txBody>
       </p:sp>
@@ -4055,8 +4097,8 @@
         </p:blipFill>
         <p:spPr>
           <a:xfrm>
-            <a:off x="8474855" y="716260"/>
-            <a:ext cx="3461954" cy="3462040"/>
+            <a:off x="8331200" y="762000"/>
+            <a:ext cx="3605609" cy="3636776"/>
           </a:xfrm>
           <a:prstGeom prst="rect">
             <a:avLst/>
@@ -4239,7 +4281,7 @@
         </p:nvSpPr>
         <p:spPr>
           <a:xfrm>
-            <a:off x="8032251" y="2586236"/>
+            <a:off x="8026001" y="1572121"/>
             <a:ext cx="3504219" cy="295275"/>
           </a:xfrm>
           <a:prstGeom prst="rect">
@@ -4281,8 +4323,8 @@
         </p:nvSpPr>
         <p:spPr>
           <a:xfrm>
-            <a:off x="8032251" y="3070523"/>
-            <a:ext cx="3504219" cy="2457053"/>
+            <a:off x="8026000" y="1943001"/>
+            <a:ext cx="3504219" cy="4009132"/>
           </a:xfrm>
           <a:prstGeom prst="rect">
             <a:avLst/>
@@ -4304,7 +4346,7 @@
               <a:buNone/>
             </a:pPr>
             <a:r>
-              <a:rPr lang="en-US" sz="1450" b="1" dirty="0">
+              <a:rPr lang="en-US" b="1" dirty="0">
                 <a:solidFill>
                   <a:srgbClr val="FFFFFF"/>
                 </a:solidFill>
@@ -4315,7 +4357,7 @@
               <a:t>Kruskal-Wallis H:</a:t>
             </a:r>
             <a:r>
-              <a:rPr lang="en-US" sz="1450" dirty="0">
+              <a:rPr lang="en-US" dirty="0">
                 <a:solidFill>
                   <a:srgbClr val="FFFFFF"/>
                 </a:solidFill>
@@ -4325,7 +4367,7 @@
               </a:rPr>
               <a:t> 196.358</a:t>
             </a:r>
-            <a:endParaRPr lang="en-US" sz="1450" dirty="0"/>
+            <a:endParaRPr lang="en-US" dirty="0"/>
           </a:p>
           <a:p>
             <a:pPr>
@@ -4337,7 +4379,7 @@
               </a:spcAft>
             </a:pPr>
             <a:r>
-              <a:rPr lang="en-US" sz="1450" b="1" dirty="0">
+              <a:rPr lang="en-US" b="1" dirty="0">
                 <a:solidFill>
                   <a:srgbClr val="FFFFFF"/>
                 </a:solidFill>
@@ -4348,7 +4390,7 @@
               <a:t>P-Value:</a:t>
             </a:r>
             <a:r>
-              <a:rPr lang="en-US" sz="1450" dirty="0">
+              <a:rPr lang="en-US" dirty="0">
                 <a:solidFill>
                   <a:srgbClr val="FFFFFF"/>
                 </a:solidFill>
@@ -4359,35 +4401,24 @@
               <a:t> </a:t>
             </a:r>
             <a:r>
-              <a:rPr lang="en-PH" dirty="0">
+              <a:rPr lang="en-PH" sz="2400" dirty="0">
                 <a:solidFill>
                   <a:schemeClr val="bg1"/>
                 </a:solidFill>
               </a:rPr>
               <a:t>5.903294656518362e-31</a:t>
             </a:r>
+            <a:endParaRPr lang="en-US" dirty="0"/>
           </a:p>
           <a:p>
             <a:pPr marL="0" indent="0" algn="l">
               <a:lnSpc>
                 <a:spcPct val="133000"/>
               </a:lnSpc>
-              <a:spcAft>
-                <a:spcPts val="1300"/>
-              </a:spcAft>
-              <a:buNone/>
-            </a:pPr>
-            <a:endParaRPr lang="en-US" sz="1450" dirty="0"/>
-          </a:p>
-          <a:p>
-            <a:pPr marL="0" indent="0" algn="l">
-              <a:lnSpc>
-                <a:spcPct val="133000"/>
-              </a:lnSpc>
-              <a:buNone/>
-            </a:pPr>
-            <a:r>
-              <a:rPr lang="en-US" sz="1450" dirty="0">
+              <a:buNone/>
+            </a:pPr>
+            <a:r>
+              <a:rPr lang="en-US" dirty="0">
                 <a:solidFill>
                   <a:srgbClr val="FFFFFF"/>
                 </a:solidFill>
@@ -4398,7 +4429,7 @@
               <a:t>The extremely low p-value confirms that Airbnb prices differ </a:t>
             </a:r>
             <a:r>
-              <a:rPr lang="en-US" sz="1450" b="1" dirty="0">
+              <a:rPr lang="en-US" b="1" dirty="0">
                 <a:solidFill>
                   <a:srgbClr val="FFFFFF"/>
                 </a:solidFill>
@@ -4409,7 +4440,7 @@
               <a:t>significantly</a:t>
             </a:r>
             <a:r>
-              <a:rPr lang="en-US" sz="1450" dirty="0">
+              <a:rPr lang="en-US" dirty="0">
                 <a:solidFill>
                   <a:srgbClr val="FFFFFF"/>
                 </a:solidFill>
@@ -4419,7 +4450,7 @@
               </a:rPr>
               <a:t> across locations. Geography is one of the strongest determinants of listing price in this dataset.</a:t>
             </a:r>
-            <a:endParaRPr lang="en-US" sz="1450" dirty="0"/>
+            <a:endParaRPr lang="en-US" dirty="0"/>
           </a:p>
         </p:txBody>
       </p:sp>
@@ -4599,7 +4630,7 @@
         </p:nvSpPr>
         <p:spPr>
           <a:xfrm>
-            <a:off x="661475" y="2435027"/>
+            <a:off x="655530" y="1998861"/>
             <a:ext cx="3504219" cy="295275"/>
           </a:xfrm>
           <a:prstGeom prst="rect">
@@ -4619,7 +4650,7 @@
               <a:buNone/>
             </a:pPr>
             <a:r>
-              <a:rPr lang="en-US" sz="1850" b="1" dirty="0">
+              <a:rPr lang="en-US" sz="2400" b="1" dirty="0">
                 <a:solidFill>
                   <a:srgbClr val="FFFFFF"/>
                 </a:solidFill>
@@ -4629,7 +4660,7 @@
               </a:rPr>
               <a:t>Key Statistics</a:t>
             </a:r>
-            <a:endParaRPr lang="en-US" sz="1850" dirty="0"/>
+            <a:endParaRPr lang="en-US" sz="2400" dirty="0"/>
           </a:p>
         </p:txBody>
       </p:sp>
@@ -4641,8 +4672,8 @@
         </p:nvSpPr>
         <p:spPr>
           <a:xfrm>
-            <a:off x="661475" y="2919313"/>
-            <a:ext cx="3504219" cy="2759472"/>
+            <a:off x="661475" y="2665114"/>
+            <a:ext cx="3504219" cy="3430885"/>
           </a:xfrm>
           <a:prstGeom prst="rect">
             <a:avLst/>
@@ -4664,7 +4695,7 @@
               <a:buNone/>
             </a:pPr>
             <a:r>
-              <a:rPr lang="en-US" sz="1450" b="1" dirty="0">
+              <a:rPr lang="en-US" sz="1600" b="1" dirty="0">
                 <a:solidFill>
                   <a:srgbClr val="FFFFFF"/>
                 </a:solidFill>
@@ -4675,7 +4706,7 @@
               <a:t>Spearman Correlation:</a:t>
             </a:r>
             <a:r>
-              <a:rPr lang="en-US" sz="1450" dirty="0">
+              <a:rPr lang="en-US" sz="1600" dirty="0">
                 <a:solidFill>
                   <a:srgbClr val="FFFFFF"/>
                 </a:solidFill>
@@ -4685,7 +4716,7 @@
               </a:rPr>
               <a:t> −0.184</a:t>
             </a:r>
-            <a:endParaRPr lang="en-US" sz="1450" dirty="0"/>
+            <a:endParaRPr lang="en-US" sz="1600" dirty="0"/>
           </a:p>
           <a:p>
             <a:pPr marL="0" indent="0" algn="l">
@@ -4698,7 +4729,7 @@
               <a:buNone/>
             </a:pPr>
             <a:r>
-              <a:rPr lang="en-US" sz="1450" b="1" dirty="0">
+              <a:rPr lang="en-US" sz="1600" b="1" dirty="0">
                 <a:solidFill>
                   <a:srgbClr val="FFFFFF"/>
                 </a:solidFill>
@@ -4709,7 +4740,7 @@
               <a:t>P-Value:</a:t>
             </a:r>
             <a:r>
-              <a:rPr lang="en-US" sz="1450" dirty="0">
+              <a:rPr lang="en-US" sz="1600" dirty="0">
                 <a:solidFill>
                   <a:srgbClr val="FFFFFF"/>
                 </a:solidFill>
@@ -4719,7 +4750,7 @@
               </a:rPr>
               <a:t> 5.38 × 10⁻⁶</a:t>
             </a:r>
-            <a:endParaRPr lang="en-US" sz="1450" dirty="0"/>
+            <a:endParaRPr lang="en-US" sz="1600" dirty="0"/>
           </a:p>
           <a:p>
             <a:pPr marL="0" indent="0" algn="l">
@@ -4729,7 +4760,7 @@
               <a:buNone/>
             </a:pPr>
             <a:r>
-              <a:rPr lang="en-US" sz="1450" dirty="0">
+              <a:rPr lang="en-US" sz="1600" dirty="0">
                 <a:solidFill>
                   <a:srgbClr val="FFFFFF"/>
                 </a:solidFill>
@@ -4740,7 +4771,7 @@
               <a:t>There is a </a:t>
             </a:r>
             <a:r>
-              <a:rPr lang="en-US" sz="1450" b="1" dirty="0">
+              <a:rPr lang="en-US" sz="1600" b="1" dirty="0">
                 <a:solidFill>
                   <a:srgbClr val="FFFFFF"/>
                 </a:solidFill>
@@ -4751,7 +4782,7 @@
               <a:t>statistically significant</a:t>
             </a:r>
             <a:r>
-              <a:rPr lang="en-US" sz="1450" dirty="0">
+              <a:rPr lang="en-US" sz="1600" dirty="0">
                 <a:solidFill>
                   <a:srgbClr val="FFFFFF"/>
                 </a:solidFill>
@@ -4761,7 +4792,7 @@
               </a:rPr>
               <a:t> but weak negative relationship between the number of reviews and Airbnb ratings. Listings with more reviews tend to have slightly lower ratings — though the effect is modest.</a:t>
             </a:r>
-            <a:endParaRPr lang="en-US" sz="1450" dirty="0"/>
+            <a:endParaRPr lang="en-US" sz="1600" dirty="0"/>
           </a:p>
         </p:txBody>
       </p:sp>
@@ -4943,8 +4974,8 @@
         </p:blipFill>
         <p:spPr>
           <a:xfrm>
-            <a:off x="383074" y="1668462"/>
-            <a:ext cx="5096938" cy="2745978"/>
+            <a:off x="383073" y="1668462"/>
+            <a:ext cx="7223071" cy="2745978"/>
           </a:xfrm>
           <a:prstGeom prst="rect">
             <a:avLst/>
@@ -4979,7 +5010,7 @@
               <a:buNone/>
             </a:pPr>
             <a:r>
-              <a:rPr lang="en-US" sz="1600" b="1" dirty="0">
+              <a:rPr lang="en-US" b="1" dirty="0">
                 <a:solidFill>
                   <a:srgbClr val="FFFFFF"/>
                 </a:solidFill>
@@ -4989,7 +5020,7 @@
               </a:rPr>
               <a:t>Peak Review Volume</a:t>
             </a:r>
-            <a:endParaRPr lang="en-US" sz="1600" dirty="0"/>
+            <a:endParaRPr lang="en-US" dirty="0"/>
           </a:p>
         </p:txBody>
       </p:sp>
@@ -5002,7 +5033,7 @@
         <p:spPr>
           <a:xfrm>
             <a:off x="7998022" y="2176165"/>
-            <a:ext cx="3538449" cy="757833"/>
+            <a:ext cx="3538449" cy="1634304"/>
           </a:xfrm>
           <a:prstGeom prst="rect">
             <a:avLst/>
@@ -5023,7 +5054,7 @@
               <a:buNone/>
             </a:pPr>
             <a:r>
-              <a:rPr lang="en-US" sz="1300" b="1" dirty="0">
+              <a:rPr lang="en-US" sz="2000" b="1" dirty="0">
                 <a:solidFill>
                   <a:srgbClr val="FFFFFF"/>
                 </a:solidFill>
@@ -5034,7 +5065,7 @@
               <a:t>June</a:t>
             </a:r>
             <a:r>
-              <a:rPr lang="en-US" sz="1300" dirty="0">
+              <a:rPr lang="en-US" sz="2000" dirty="0">
                 <a:solidFill>
                   <a:srgbClr val="FFFFFF"/>
                 </a:solidFill>
@@ -5045,7 +5076,7 @@
               <a:t> recorded the highest number of reviews with </a:t>
             </a:r>
             <a:r>
-              <a:rPr lang="en-US" sz="1300" b="1" dirty="0">
+              <a:rPr lang="en-US" sz="2000" b="1" dirty="0">
                 <a:solidFill>
                   <a:srgbClr val="FFFFFF"/>
                 </a:solidFill>
@@ -5056,7 +5087,7 @@
               <a:t>66,386</a:t>
             </a:r>
             <a:r>
-              <a:rPr lang="en-US" sz="1300" dirty="0">
+              <a:rPr lang="en-US" sz="2000" dirty="0">
                 <a:solidFill>
                   <a:srgbClr val="FFFFFF"/>
                 </a:solidFill>
@@ -5066,7 +5097,7 @@
               </a:rPr>
               <a:t> total — reflecting peak travel season demand.</a:t>
             </a:r>
-            <a:endParaRPr lang="en-US" sz="1300" dirty="0"/>
+            <a:endParaRPr lang="en-US" sz="2000" dirty="0"/>
           </a:p>
         </p:txBody>
       </p:sp>
@@ -5078,7 +5109,7 @@
         </p:nvSpPr>
         <p:spPr>
           <a:xfrm>
-            <a:off x="7998022" y="3082330"/>
+            <a:off x="7991771" y="3981635"/>
             <a:ext cx="3538449" cy="261640"/>
           </a:xfrm>
           <a:prstGeom prst="rect">
@@ -5120,8 +5151,8 @@
         </p:nvSpPr>
         <p:spPr>
           <a:xfrm>
-            <a:off x="7998022" y="3492302"/>
-            <a:ext cx="3538449" cy="757833"/>
+            <a:off x="7998022" y="4414441"/>
+            <a:ext cx="3538449" cy="2069486"/>
           </a:xfrm>
           <a:prstGeom prst="rect">
             <a:avLst/>
@@ -5142,7 +5173,7 @@
               <a:buNone/>
             </a:pPr>
             <a:r>
-              <a:rPr lang="en-US" sz="1300" b="1" dirty="0">
+              <a:rPr lang="en-US" sz="2000" b="1" dirty="0">
                 <a:solidFill>
                   <a:srgbClr val="FFFFFF"/>
                 </a:solidFill>
@@ -5153,7 +5184,7 @@
               <a:t>May</a:t>
             </a:r>
             <a:r>
-              <a:rPr lang="en-US" sz="1300" dirty="0">
+              <a:rPr lang="en-US" sz="2000" dirty="0">
                 <a:solidFill>
                   <a:srgbClr val="FFFFFF"/>
                 </a:solidFill>
@@ -5164,7 +5195,7 @@
               <a:t> achieved the highest average rating at </a:t>
             </a:r>
             <a:r>
-              <a:rPr lang="en-US" sz="1300" b="1" dirty="0">
+              <a:rPr lang="en-US" sz="2000" b="1" dirty="0">
                 <a:solidFill>
                   <a:srgbClr val="FFFFFF"/>
                 </a:solidFill>
@@ -5175,7 +5206,7 @@
               <a:t>4.98</a:t>
             </a:r>
             <a:r>
-              <a:rPr lang="en-US" sz="1300" dirty="0">
+              <a:rPr lang="en-US" sz="2000" dirty="0">
                 <a:solidFill>
                   <a:srgbClr val="FFFFFF"/>
                 </a:solidFill>
@@ -5185,7 +5216,7 @@
               </a:rPr>
               <a:t>, suggesting slightly better guest satisfaction just before the busiest month.</a:t>
             </a:r>
-            <a:endParaRPr lang="en-US" sz="1300" dirty="0"/>
+            <a:endParaRPr lang="en-US" sz="2000" dirty="0"/>
           </a:p>
         </p:txBody>
       </p:sp>
@@ -5205,8 +5236,8 @@
         </p:blipFill>
         <p:spPr>
           <a:xfrm>
-            <a:off x="5480012" y="4270275"/>
-            <a:ext cx="4751108" cy="2559685"/>
+            <a:off x="383074" y="4298315"/>
+            <a:ext cx="7223070" cy="2559685"/>
           </a:xfrm>
           <a:prstGeom prst="rect">
             <a:avLst/>
@@ -7132,7 +7163,7 @@
         </p:nvSpPr>
         <p:spPr>
           <a:xfrm>
-            <a:off x="5233360" y="2054523"/>
+            <a:off x="5035932" y="645216"/>
             <a:ext cx="1391012" cy="287139"/>
           </a:xfrm>
           <a:prstGeom prst="roundRect">
@@ -7161,7 +7192,7 @@
         </p:nvSpPr>
         <p:spPr>
           <a:xfrm>
-            <a:off x="5346765" y="2111177"/>
+            <a:off x="5209106" y="760359"/>
             <a:ext cx="1773788" cy="173831"/>
           </a:xfrm>
           <a:prstGeom prst="rect">
@@ -7203,7 +7234,7 @@
         </p:nvSpPr>
         <p:spPr>
           <a:xfrm>
-            <a:off x="5233360" y="2417266"/>
+            <a:off x="5108669" y="1047498"/>
             <a:ext cx="6296860" cy="590649"/>
           </a:xfrm>
           <a:prstGeom prst="rect">
@@ -7245,8 +7276,8 @@
         </p:nvSpPr>
         <p:spPr>
           <a:xfrm>
-            <a:off x="5233360" y="3291384"/>
-            <a:ext cx="6296860" cy="1512094"/>
+            <a:off x="5233360" y="1751455"/>
+            <a:ext cx="6296860" cy="4181754"/>
           </a:xfrm>
           <a:prstGeom prst="rect">
             <a:avLst/>
@@ -7267,7 +7298,7 @@
               <a:buNone/>
             </a:pPr>
             <a:r>
-              <a:rPr lang="en-US" sz="1450" dirty="0">
+              <a:rPr lang="en-US" sz="2400" dirty="0">
                 <a:solidFill>
                   <a:srgbClr val="FFFFFF"/>
                 </a:solidFill>
@@ -7277,11 +7308,150 @@
               </a:rPr>
               <a:t>The short-term rental market has grown rapidly, with Airbnb becoming a dominant platform for travelers worldwide. As competition intensifies, understanding what drives guest satisfaction — and what leads to poor ratings — has become critical for hosts seeking to improve their listings and maximize bookings.</a:t>
             </a:r>
-            <a:endParaRPr lang="en-US" sz="1450" dirty="0"/>
+            <a:endParaRPr lang="en-US" sz="2400" dirty="0"/>
           </a:p>
         </p:txBody>
       </p:sp>
     </p:spTree>
+  </p:cSld>
+  <p:clrMapOvr>
+    <a:masterClrMapping/>
+  </p:clrMapOvr>
+</p:sld>
+</file>
+
+<file path=ppt/slides/slide20.xml><?xml version="1.0" encoding="utf-8"?>
+<p:sld xmlns:a="http://schemas.openxmlformats.org/drawingml/2006/main" xmlns:r="http://schemas.openxmlformats.org/officeDocument/2006/relationships" xmlns:p="http://schemas.openxmlformats.org/presentationml/2006/main">
+  <p:cSld>
+    <p:spTree>
+      <p:nvGrpSpPr>
+        <p:cNvPr id="1" name=""/>
+        <p:cNvGrpSpPr/>
+        <p:nvPr/>
+      </p:nvGrpSpPr>
+      <p:grpSpPr>
+        <a:xfrm>
+          <a:off x="0" y="0"/>
+          <a:ext cx="0" cy="0"/>
+          <a:chOff x="0" y="0"/>
+          <a:chExt cx="0" cy="0"/>
+        </a:xfrm>
+      </p:grpSpPr>
+      <p:sp>
+        <p:nvSpPr>
+          <p:cNvPr id="2" name="TextBox 1">
+            <a:extLst>
+              <a:ext uri="{FF2B5EF4-FFF2-40B4-BE49-F238E27FC236}">
+                <a16:creationId xmlns:a16="http://schemas.microsoft.com/office/drawing/2014/main" id="{B3BC6852-58B0-B60F-6ACD-898720F6C461}"/>
+              </a:ext>
+            </a:extLst>
+          </p:cNvPr>
+          <p:cNvSpPr txBox="1"/>
+          <p:nvPr/>
+        </p:nvSpPr>
+        <p:spPr>
+          <a:xfrm>
+            <a:off x="1995055" y="1641763"/>
+            <a:ext cx="8437418" cy="3416320"/>
+          </a:xfrm>
+          <a:prstGeom prst="rect">
+            <a:avLst/>
+          </a:prstGeom>
+          <a:noFill/>
+        </p:spPr>
+        <p:txBody>
+          <a:bodyPr wrap="square" rtlCol="0">
+            <a:spAutoFit/>
+          </a:bodyPr>
+          <a:lstStyle/>
+          <a:p>
+            <a:r>
+              <a:rPr lang="en-US" sz="3600" dirty="0">
+                <a:solidFill>
+                  <a:schemeClr val="bg1"/>
+                </a:solidFill>
+              </a:rPr>
+              <a:t>Thank you for listening!</a:t>
+            </a:r>
+          </a:p>
+          <a:p>
+            <a:endParaRPr lang="en-US" sz="3600" dirty="0">
+              <a:solidFill>
+                <a:schemeClr val="bg1"/>
+              </a:solidFill>
+            </a:endParaRPr>
+          </a:p>
+          <a:p>
+            <a:r>
+              <a:rPr lang="en-US" sz="3600" dirty="0">
+                <a:solidFill>
+                  <a:schemeClr val="bg1"/>
+                </a:solidFill>
+              </a:rPr>
+              <a:t>For queries, you may email us @:</a:t>
+            </a:r>
+          </a:p>
+          <a:p>
+            <a:endParaRPr lang="en-US" sz="3600" dirty="0">
+              <a:solidFill>
+                <a:schemeClr val="bg1"/>
+              </a:solidFill>
+            </a:endParaRPr>
+          </a:p>
+          <a:p>
+            <a:r>
+              <a:rPr lang="en-US" sz="3600" dirty="0">
+                <a:solidFill>
+                  <a:schemeClr val="bg1"/>
+                </a:solidFill>
+              </a:rPr>
+              <a:t>Jan Noel – </a:t>
+            </a:r>
+            <a:r>
+              <a:rPr lang="en-US" sz="3600" dirty="0" err="1">
+                <a:solidFill>
+                  <a:schemeClr val="bg1"/>
+                </a:solidFill>
+              </a:rPr>
+              <a:t>jannoe.vero@gmail.com</a:t>
+            </a:r>
+            <a:endParaRPr lang="en-US" sz="3600" dirty="0">
+              <a:solidFill>
+                <a:schemeClr val="bg1"/>
+              </a:solidFill>
+            </a:endParaRPr>
+          </a:p>
+          <a:p>
+            <a:r>
+              <a:rPr lang="en-US" sz="3600" dirty="0">
+                <a:solidFill>
+                  <a:schemeClr val="bg1"/>
+                </a:solidFill>
+              </a:rPr>
+              <a:t>Nadiya – </a:t>
+            </a:r>
+            <a:r>
+              <a:rPr lang="en-US" sz="3600" dirty="0" err="1">
+                <a:solidFill>
+                  <a:schemeClr val="bg1"/>
+                </a:solidFill>
+              </a:rPr>
+              <a:t>nadiya.alshahaibi@gmail.com</a:t>
+            </a:r>
+            <a:endParaRPr lang="en-US" sz="3600" dirty="0">
+              <a:solidFill>
+                <a:schemeClr val="bg1"/>
+              </a:solidFill>
+            </a:endParaRPr>
+          </a:p>
+        </p:txBody>
+      </p:sp>
+    </p:spTree>
+    <p:extLst>
+      <p:ext uri="{BB962C8B-B14F-4D97-AF65-F5344CB8AC3E}">
+        <p14:creationId xmlns:p14="http://schemas.microsoft.com/office/powerpoint/2010/main" val="1357625962"/>
+      </p:ext>
+    </p:extLst>
   </p:cSld>
   <p:clrMapOvr>
     <a:masterClrMapping/>
@@ -7314,7 +7484,7 @@
         </p:nvSpPr>
         <p:spPr>
           <a:xfrm>
-            <a:off x="661475" y="1935262"/>
+            <a:off x="432875" y="293498"/>
             <a:ext cx="2050602" cy="287139"/>
           </a:xfrm>
           <a:prstGeom prst="roundRect">
@@ -7343,7 +7513,7 @@
         </p:nvSpPr>
         <p:spPr>
           <a:xfrm>
-            <a:off x="774879" y="1991916"/>
+            <a:off x="525350" y="350151"/>
             <a:ext cx="2433378" cy="173831"/>
           </a:xfrm>
           <a:prstGeom prst="rect">
@@ -7385,7 +7555,7 @@
         </p:nvSpPr>
         <p:spPr>
           <a:xfrm>
-            <a:off x="661475" y="2298005"/>
+            <a:off x="525350" y="712993"/>
             <a:ext cx="10868745" cy="590649"/>
           </a:xfrm>
           <a:prstGeom prst="rect">
@@ -7427,8 +7597,8 @@
         </p:nvSpPr>
         <p:spPr>
           <a:xfrm>
-            <a:off x="525350" y="3172123"/>
-            <a:ext cx="5476043" cy="1750616"/>
+            <a:off x="525350" y="1492653"/>
+            <a:ext cx="5476043" cy="4652354"/>
           </a:xfrm>
           <a:prstGeom prst="roundRect">
             <a:avLst>
@@ -7444,7 +7614,7 @@
           <a:bodyPr/>
           <a:lstStyle/>
           <a:p>
-            <a:endParaRPr lang="en-US"/>
+            <a:endParaRPr lang="en-US" dirty="0"/>
           </a:p>
         </p:txBody>
       </p:sp>
@@ -7456,7 +7626,7 @@
         </p:nvSpPr>
         <p:spPr>
           <a:xfrm>
-            <a:off x="714357" y="3361134"/>
+            <a:off x="714356" y="1883954"/>
             <a:ext cx="5098029" cy="295275"/>
           </a:xfrm>
           <a:prstGeom prst="rect">
@@ -7476,7 +7646,7 @@
               <a:buNone/>
             </a:pPr>
             <a:r>
-              <a:rPr lang="en-US" sz="1850" b="1" dirty="0">
+              <a:rPr lang="en-US" sz="3200" b="1" dirty="0">
                 <a:solidFill>
                   <a:srgbClr val="000000"/>
                 </a:solidFill>
@@ -7486,7 +7656,7 @@
               </a:rPr>
               <a:t>Goal</a:t>
             </a:r>
-            <a:endParaRPr lang="en-US" sz="1850" dirty="0"/>
+            <a:endParaRPr lang="en-US" sz="2000" dirty="0"/>
           </a:p>
         </p:txBody>
       </p:sp>
@@ -7498,8 +7668,8 @@
         </p:nvSpPr>
         <p:spPr>
           <a:xfrm>
-            <a:off x="714357" y="3845421"/>
-            <a:ext cx="5098029" cy="907256"/>
+            <a:off x="714357" y="2368240"/>
+            <a:ext cx="5098029" cy="3616924"/>
           </a:xfrm>
           <a:prstGeom prst="rect">
             <a:avLst/>
@@ -7509,7 +7679,7 @@
         </p:spPr>
         <p:txBody>
           <a:bodyPr wrap="square" lIns="0" tIns="0" rIns="0" bIns="0" rtlCol="0" anchor="t">
-            <a:normAutofit/>
+            <a:normAutofit fontScale="92500"/>
           </a:bodyPr>
           <a:lstStyle/>
           <a:p>
@@ -7520,7 +7690,7 @@
               <a:buNone/>
             </a:pPr>
             <a:r>
-              <a:rPr lang="en-US" sz="1450" dirty="0">
+              <a:rPr lang="en-US" sz="3200" dirty="0">
                 <a:solidFill>
                   <a:srgbClr val="000000"/>
                 </a:solidFill>
@@ -7530,7 +7700,7 @@
               </a:rPr>
               <a:t>Identify the characteristics of low-rated Airbnb listings and determine which property features are associated with higher guest satisfaction.</a:t>
             </a:r>
-            <a:endParaRPr lang="en-US" sz="1450" dirty="0"/>
+            <a:endParaRPr lang="en-US" sz="3200" dirty="0"/>
           </a:p>
         </p:txBody>
       </p:sp>
@@ -7542,8 +7712,8 @@
         </p:nvSpPr>
         <p:spPr>
           <a:xfrm>
-            <a:off x="6332776" y="3361134"/>
-            <a:ext cx="5203794" cy="295275"/>
+            <a:off x="6273850" y="1787236"/>
+            <a:ext cx="5203794" cy="391993"/>
           </a:xfrm>
           <a:prstGeom prst="rect">
             <a:avLst/>
@@ -7562,7 +7732,7 @@
               <a:buNone/>
             </a:pPr>
             <a:r>
-              <a:rPr lang="en-US" sz="1850" b="1" dirty="0">
+              <a:rPr lang="en-US" sz="2800" b="1" dirty="0">
                 <a:solidFill>
                   <a:srgbClr val="FFFFFF"/>
                 </a:solidFill>
@@ -7572,7 +7742,7 @@
               </a:rPr>
               <a:t>Objective</a:t>
             </a:r>
-            <a:endParaRPr lang="en-US" sz="1850" dirty="0"/>
+            <a:endParaRPr lang="en-US" sz="2000" dirty="0"/>
           </a:p>
         </p:txBody>
       </p:sp>
@@ -7584,8 +7754,8 @@
         </p:nvSpPr>
         <p:spPr>
           <a:xfrm>
-            <a:off x="6332776" y="3845421"/>
-            <a:ext cx="5203794" cy="907256"/>
+            <a:off x="6332776" y="2179228"/>
+            <a:ext cx="5203794" cy="3805935"/>
           </a:xfrm>
           <a:prstGeom prst="rect">
             <a:avLst/>
@@ -7595,7 +7765,7 @@
         </p:spPr>
         <p:txBody>
           <a:bodyPr wrap="square" lIns="0" tIns="0" rIns="0" bIns="0" rtlCol="0" anchor="t">
-            <a:normAutofit/>
+            <a:normAutofit lnSpcReduction="10000"/>
           </a:bodyPr>
           <a:lstStyle/>
           <a:p>
@@ -7606,7 +7776,7 @@
               <a:buNone/>
             </a:pPr>
             <a:r>
-              <a:rPr lang="en-US" sz="1450" dirty="0">
+              <a:rPr lang="en-US" sz="3200" dirty="0">
                 <a:solidFill>
                   <a:srgbClr val="FFFFFF"/>
                 </a:solidFill>
@@ -7616,7 +7786,7 @@
               </a:rPr>
               <a:t>Analyze Airbnb listing characteristics that influence guest ratings and identify practical strategies for improving underperforming listings.</a:t>
             </a:r>
-            <a:endParaRPr lang="en-US" sz="1450" dirty="0"/>
+            <a:endParaRPr lang="en-US" sz="3200" dirty="0"/>
           </a:p>
         </p:txBody>
       </p:sp>
@@ -7752,7 +7922,7 @@
                 <a:ea typeface="Inter Bold" pitchFamily="34" charset="-122"/>
                 <a:cs typeface="Inter Bold" pitchFamily="34" charset="-120"/>
               </a:rPr>
-              <a:t>10 Research Questions</a:t>
+              <a:t>Research Questions</a:t>
             </a:r>
             <a:endParaRPr lang="en-US" sz="2750" dirty="0"/>
           </a:p>
@@ -8832,7 +9002,7 @@
                   <a:schemeClr val="bg1"/>
                 </a:solidFill>
               </a:rPr>
-              <a:t>Which month has the highest number of reviews and the highest average Airbnb rating?</a:t>
+              <a:t>Which month the highest number of reviews and the highest average Airbnb rating? </a:t>
             </a:r>
           </a:p>
         </p:txBody>
@@ -9087,8 +9257,8 @@
         </p:nvSpPr>
         <p:spPr>
           <a:xfrm>
-            <a:off x="661475" y="3082230"/>
-            <a:ext cx="5238421" cy="713184"/>
+            <a:off x="661475" y="1560712"/>
+            <a:ext cx="5238421" cy="2234702"/>
           </a:xfrm>
           <a:prstGeom prst="rect">
             <a:avLst/>
@@ -9098,7 +9268,7 @@
         </p:spPr>
         <p:txBody>
           <a:bodyPr wrap="square" lIns="0" tIns="0" rIns="0" bIns="0" rtlCol="0" anchor="t">
-            <a:normAutofit/>
+            <a:normAutofit fontScale="92500" lnSpcReduction="20000"/>
           </a:bodyPr>
           <a:lstStyle/>
           <a:p>
@@ -9109,7 +9279,7 @@
               <a:buNone/>
             </a:pPr>
             <a:r>
-              <a:rPr lang="en-US" sz="1250" dirty="0">
+              <a:rPr lang="en-US" sz="2400" dirty="0">
                 <a:solidFill>
                   <a:srgbClr val="FFFFFF"/>
                 </a:solidFill>
@@ -9119,7 +9289,7 @@
               </a:rPr>
               <a:t>Each research question was tested using null (H₀) and alternative (H₁) hypotheses to determine statistical significance across price, property type, amenities, location, and review volume.</a:t>
             </a:r>
-            <a:endParaRPr lang="en-US" sz="1250" dirty="0"/>
+            <a:endParaRPr lang="en-US" sz="2400" dirty="0"/>
           </a:p>
         </p:txBody>
       </p:sp>
@@ -9132,7 +9302,7 @@
         <p:spPr>
           <a:xfrm>
             <a:off x="661475" y="3949005"/>
-            <a:ext cx="5238421" cy="801291"/>
+            <a:ext cx="5238421" cy="2234702"/>
           </a:xfrm>
           <a:prstGeom prst="roundRect">
             <a:avLst>
@@ -9185,7 +9355,7 @@
         <p:spPr>
           <a:xfrm>
             <a:off x="1183551" y="4111923"/>
-            <a:ext cx="4555713" cy="475456"/>
+            <a:ext cx="4555713" cy="1779722"/>
           </a:xfrm>
           <a:prstGeom prst="rect">
             <a:avLst/>
@@ -9206,7 +9376,7 @@
               <a:buNone/>
             </a:pPr>
             <a:r>
-              <a:rPr lang="en-US" sz="1250" dirty="0">
+              <a:rPr lang="en-US" sz="2400" dirty="0">
                 <a:solidFill>
                   <a:srgbClr val="FFFFFF"/>
                 </a:solidFill>
@@ -9216,7 +9386,7 @@
               </a:rPr>
               <a:t>All hypotheses were tested at a standard significance level to ensure rigorous, reproducible findings.</a:t>
             </a:r>
-            <a:endParaRPr lang="en-US" sz="1250" dirty="0"/>
+            <a:endParaRPr lang="en-US" sz="2400" dirty="0"/>
           </a:p>
         </p:txBody>
       </p:sp>
@@ -9236,8 +9406,8 @@
         </p:blipFill>
         <p:spPr>
           <a:xfrm>
-            <a:off x="6298149" y="1705273"/>
-            <a:ext cx="4452628" cy="4452739"/>
+            <a:off x="5899896" y="594420"/>
+            <a:ext cx="5961706" cy="5961855"/>
           </a:xfrm>
           <a:prstGeom prst="rect">
             <a:avLst/>
@@ -10897,8 +11067,8 @@
         </p:blipFill>
         <p:spPr>
           <a:xfrm>
-            <a:off x="661475" y="2084090"/>
-            <a:ext cx="5207465" cy="3748385"/>
+            <a:off x="162079" y="2084090"/>
+            <a:ext cx="6126934" cy="4410228"/>
           </a:xfrm>
           <a:prstGeom prst="rect">
             <a:avLst/>
@@ -11345,7 +11515,7 @@
               <a:buNone/>
             </a:pPr>
             <a:r>
-              <a:rPr lang="en-US" sz="1550" b="1" dirty="0">
+              <a:rPr lang="en-US" sz="2000" b="1" dirty="0">
                 <a:solidFill>
                   <a:srgbClr val="FFFFFF"/>
                 </a:solidFill>
@@ -11355,7 +11525,7 @@
               </a:rPr>
               <a:t>Price Gap Analysis</a:t>
             </a:r>
-            <a:endParaRPr lang="en-US" sz="1550" dirty="0"/>
+            <a:endParaRPr lang="en-US" sz="2000" dirty="0"/>
           </a:p>
         </p:txBody>
       </p:sp>
@@ -11368,7 +11538,7 @@
         <p:spPr>
           <a:xfrm>
             <a:off x="6298149" y="2170509"/>
-            <a:ext cx="5238421" cy="1311473"/>
+            <a:ext cx="5238421" cy="2834581"/>
           </a:xfrm>
           <a:prstGeom prst="rect">
             <a:avLst/>
@@ -11392,7 +11562,7 @@
               <a:buNone/>
             </a:pPr>
             <a:r>
-              <a:rPr lang="en-US" sz="1250" dirty="0">
+              <a:rPr lang="en-US" sz="2000" dirty="0">
                 <a:solidFill>
                   <a:srgbClr val="FFFFFF"/>
                 </a:solidFill>
@@ -11403,7 +11573,7 @@
               <a:t>Highly rated listings command significantly higher prices — an average of </a:t>
             </a:r>
             <a:r>
-              <a:rPr lang="en-US" sz="1250" b="1" dirty="0">
+              <a:rPr lang="en-US" sz="2000" b="1" dirty="0">
                 <a:solidFill>
                   <a:srgbClr val="FFFFFF"/>
                 </a:solidFill>
@@ -11414,7 +11584,7 @@
               <a:t>$168.93</a:t>
             </a:r>
             <a:r>
-              <a:rPr lang="en-US" sz="1250" dirty="0">
+              <a:rPr lang="en-US" sz="2000" dirty="0">
                 <a:solidFill>
                   <a:srgbClr val="FFFFFF"/>
                 </a:solidFill>
@@ -11425,7 +11595,7 @@
               <a:t> versus </a:t>
             </a:r>
             <a:r>
-              <a:rPr lang="en-US" sz="1250" b="1" dirty="0">
+              <a:rPr lang="en-US" sz="2000" b="1" dirty="0">
                 <a:solidFill>
                   <a:srgbClr val="FFFFFF"/>
                 </a:solidFill>
@@ -11436,7 +11606,7 @@
               <a:t>$102.55</a:t>
             </a:r>
             <a:r>
-              <a:rPr lang="en-US" sz="1250" dirty="0">
+              <a:rPr lang="en-US" sz="2000" dirty="0">
                 <a:solidFill>
                   <a:srgbClr val="FFFFFF"/>
                 </a:solidFill>
@@ -11447,7 +11617,7 @@
               <a:t> for low-rated listings, a difference of nearly </a:t>
             </a:r>
             <a:r>
-              <a:rPr lang="en-US" sz="1250" b="1" dirty="0">
+              <a:rPr lang="en-US" sz="2000" b="1" dirty="0">
                 <a:solidFill>
                   <a:srgbClr val="FCB958"/>
                 </a:solidFill>
@@ -11458,7 +11628,7 @@
               <a:t>$66</a:t>
             </a:r>
             <a:r>
-              <a:rPr lang="en-US" sz="1250" dirty="0">
+              <a:rPr lang="en-US" sz="2000" dirty="0">
                 <a:solidFill>
                   <a:srgbClr val="FFFFFF"/>
                 </a:solidFill>
@@ -11468,7 +11638,7 @@
               </a:rPr>
               <a:t>.</a:t>
             </a:r>
-            <a:endParaRPr lang="en-US" sz="1250" dirty="0"/>
+            <a:endParaRPr lang="en-US" sz="2000" dirty="0"/>
           </a:p>
           <a:p>
             <a:pPr marL="0" indent="0" algn="l">
@@ -11478,7 +11648,7 @@
               <a:buNone/>
             </a:pPr>
             <a:r>
-              <a:rPr lang="en-US" sz="1250" dirty="0">
+              <a:rPr lang="en-US" sz="2000" dirty="0">
                 <a:solidFill>
                   <a:srgbClr val="FFFFFF"/>
                 </a:solidFill>
@@ -11489,7 +11659,7 @@
               <a:t>Median prices reinforce this trend: </a:t>
             </a:r>
             <a:r>
-              <a:rPr lang="en-US" sz="1250" b="1" dirty="0">
+              <a:rPr lang="en-US" sz="2000" b="1" dirty="0">
                 <a:solidFill>
                   <a:srgbClr val="FFFFFF"/>
                 </a:solidFill>
@@ -11500,7 +11670,7 @@
               <a:t>$131</a:t>
             </a:r>
             <a:r>
-              <a:rPr lang="en-US" sz="1250" dirty="0">
+              <a:rPr lang="en-US" sz="2000" dirty="0">
                 <a:solidFill>
                   <a:srgbClr val="FFFFFF"/>
                 </a:solidFill>
@@ -11511,7 +11681,7 @@
               <a:t> (high) vs. </a:t>
             </a:r>
             <a:r>
-              <a:rPr lang="en-US" sz="1250" b="1" dirty="0">
+              <a:rPr lang="en-US" sz="2000" b="1" dirty="0">
                 <a:solidFill>
                   <a:srgbClr val="FFFFFF"/>
                 </a:solidFill>
@@ -11522,7 +11692,7 @@
               <a:t>$79</a:t>
             </a:r>
             <a:r>
-              <a:rPr lang="en-US" sz="1250" dirty="0">
+              <a:rPr lang="en-US" sz="2000" dirty="0">
                 <a:solidFill>
                   <a:srgbClr val="FFFFFF"/>
                 </a:solidFill>
@@ -11532,7 +11702,7 @@
               </a:rPr>
               <a:t> (low), suggesting the gap is not driven by outliers.</a:t>
             </a:r>
-            <a:endParaRPr lang="en-US" sz="1250" dirty="0"/>
+            <a:endParaRPr lang="en-US" sz="2000" dirty="0"/>
           </a:p>
         </p:txBody>
       </p:sp>
